--- a/praesentation2/SKP-Poolreform-Modelle-und-Financial-Model.pptx
+++ b/praesentation2/SKP-Poolreform-Modelle-und-Financial-Model.pptx
@@ -646,10 +646,10 @@
                   <c:v>14.6</c:v>
                 </c:pt>
                 <c:pt idx="2">
-                  <c:v>23.57</c:v>
+                  <c:v>19.64</c:v>
                 </c:pt>
                 <c:pt idx="3">
-                  <c:v>26.57</c:v>
+                  <c:v>22.15</c:v>
                 </c:pt>
               </c:numCache>
             </c:numRef>
@@ -725,7 +725,7 @@
       <c:valAx>
         <c:axId val="-2113994440"/>
         <c:scaling>
-          <c:max val="30.0"/>
+          <c:max val="24.0"/>
         </c:scaling>
         <c:delete val="0"/>
         <c:axPos val="l"/>
@@ -764,7 +764,7 @@
         </c:txPr>
         <c:crossAx val="-2068027336"/>
         <c:crosses val="autoZero"/>
-        <c:majorUnit val="10.0"/>
+        <c:majorUnit val="8.0"/>
       </c:valAx>
     </c:plotArea>
     <c:dispBlanksAs val="gap"/>
@@ -808,7 +808,59 @@
               <c:strCache>
                 <c:ptCount val="1"/>
                 <c:pt idx="0">
-                  <c:v>Schulbegleitungen</c:v>
+                  <c:v>2014</c:v>
+                </c:pt>
+              </c:strCache>
+            </c:strRef>
+          </c:tx>
+          <c:spPr>
+            <a:solidFill>
+              <a:srgbClr val="888888"/>
+            </a:solidFill>
+            <a:ln>
+              <a:noFill/>
+            </a:ln>
+          </c:spPr>
+          <c:cat>
+            <c:strRef>
+              <c:f>Sheet1!$A$2:$A$3</c:f>
+              <c:strCache>
+                <c:ptCount val="2"/>
+                <c:pt idx="0">
+                  <c:v>Schleswig-Holstein</c:v>
+                </c:pt>
+                <c:pt idx="1">
+                  <c:v>Hamburg</c:v>
+                </c:pt>
+              </c:strCache>
+            </c:strRef>
+          </c:cat>
+          <c:val>
+            <c:numRef>
+              <c:f>Sheet1!$B$2:$B$3</c:f>
+              <c:numCache>
+                <c:formatCode>General</c:formatCode>
+                <c:ptCount val="2"/>
+                <c:pt idx="0">
+                  <c:v>2700</c:v>
+                </c:pt>
+                <c:pt idx="1">
+                  <c:v>1574</c:v>
+                </c:pt>
+              </c:numCache>
+            </c:numRef>
+          </c:val>
+        </c:ser>
+        <c:ser>
+          <c:idx val="1"/>
+          <c:order val="1"/>
+          <c:tx>
+            <c:strRef>
+              <c:f>Sheet1!$C$1</c:f>
+              <c:strCache>
+                <c:ptCount val="1"/>
+                <c:pt idx="0">
+                  <c:v>zuletzt</c:v>
                 </c:pt>
               </c:strCache>
             </c:strRef>
@@ -827,25 +879,25 @@
               <c:strCache>
                 <c:ptCount val="2"/>
                 <c:pt idx="0">
-                  <c:v>2014</c:v>
+                  <c:v>Schleswig-Holstein</c:v>
                 </c:pt>
                 <c:pt idx="1">
-                  <c:v>2022</c:v>
+                  <c:v>Hamburg</c:v>
                 </c:pt>
               </c:strCache>
             </c:strRef>
           </c:cat>
           <c:val>
             <c:numRef>
-              <c:f>Sheet1!$B$2:$B$3</c:f>
+              <c:f>Sheet1!$C$2:$C$3</c:f>
               <c:numCache>
                 <c:formatCode>General</c:formatCode>
                 <c:ptCount val="2"/>
                 <c:pt idx="0">
-                  <c:v>2700</c:v>
+                  <c:v>7000</c:v>
                 </c:pt>
                 <c:pt idx="1">
-                  <c:v>7000</c:v>
+                  <c:v>4011</c:v>
                 </c:pt>
               </c:numCache>
             </c:numRef>
@@ -858,7 +910,7 @@
             <a:lstStyle/>
             <a:p>
               <a:pPr>
-                <a:defRPr sz="800" b="1">
+                <a:defRPr sz="720" b="1">
                   <a:solidFill>
                     <a:srgbClr val="3D3D3D"/>
                   </a:solidFill>
@@ -876,7 +928,7 @@
           <c:showBubbleSize val="0"/>
           <c:showLeaderLines val="1"/>
         </c:dLbls>
-        <c:gapWidth val="110"/>
+        <c:gapWidth val="80"/>
         <c:axId val="-2068027336"/>
         <c:axId val="-2113994440"/>
       </c:barChart>
@@ -963,6 +1015,24 @@
         <c:majorUnit val="2000.0"/>
       </c:valAx>
     </c:plotArea>
+    <c:legend>
+      <c:legendPos val="b"/>
+      <c:overlay val="0"/>
+      <c:txPr>
+        <a:bodyPr/>
+        <a:lstStyle/>
+        <a:p>
+          <a:pPr>
+            <a:defRPr sz="700">
+              <a:solidFill>
+                <a:srgbClr val="3D3D3D"/>
+              </a:solidFill>
+              <a:latin typeface="Open Sans"/>
+            </a:defRPr>
+          </a:pPr>
+        </a:p>
+      </c:txPr>
+    </c:legend>
     <c:dispBlanksAs val="gap"/>
   </c:chart>
   <c:txPr>
@@ -5004,7 +5074,7 @@
           <a:lstStyle/>
           <a:p>
             <a:r>
-              <a:t>Drei Spalten, drei Verschiebungen. Erstens Qualifikation: Unten bleibt es ungelernt, aber es entsteht eine Fachkraftebene darüber — die ist der eigentliche Zugangsschlüssel. Zweitens Vertrag: aus hunderten Jahresbescheiden wird ein Festpreisvertrag über bis zu neun Jahre ohne Tarifausgleich. Das ist der ökonomische Kern. Drittens Machtverhältnis: Es gibt laute Kritik, aber sie hat keine Hebelwirkung — der Kreis zahlt, der Kreis vergibt, und der Rechtsweg ist zu.</a:t>
+              <a:t>Drei Spalten, drei Verschiebungen. Erstens Qualifikation: Unten bleibt es ungelernt, aber es entsteht eine Fachkraftebene darüber — die ist der eigentliche Zugangsschlüssel. Zweitens Vertrag: aus hunderten Jahresbescheiden wird ein Festpreisvertrag über bis zu neun Jahre ohne Tarifausgleich. Das ist der ökonomische Kern. Drittens die Politik — und hier bitte genau unterscheiden: Die SPD taucht in beiden Spalten auf. In Schleswig-Holstein drängt sie auf schnellere Poollösungen, im Bund nennen ihre Abgeordneten die Streichliste inakzeptabel. Sie ist also gegen das Sparpaket, nicht gegen den Pool. Und unten die Mehrheiten: Land und Kreis werden beide CDU-geführt regiert, der Entwurf im Bund kommt aus dem Haus der früheren SH-Bildungsministerin. Dieselbe politische Linie auf drei Ebenen — Kritik gibt es laut, Hebel hat sie keinen.</a:t>
             </a:r>
           </a:p>
         </p:txBody>
@@ -5144,7 +5214,7 @@
           <a:lstStyle/>
           <a:p>
             <a:r>
-              <a:t>Vier Zahlen zum Merken. Erstens: Der Tarifsatz, mit dem der Kreis kalkuliert, liegt 70 Prozent über dem Mindestlohn — wer heute Mindestlohn zahlt, hat im Pool zunächst Luft. Zweitens: Die Nachfrage hat sich in acht Jahren mehr als verzweieinhalbfacht. Drittens: Das Budget hängt an Klassen, nicht an Fällen — die Menge ist damit planbar. Viertens, und das ist der Haken: Der Preis steht bis zu neun Jahre fest, Tarifsteigerungen trägt der Träger allein. Deshalb ist die Kalkulation beim Angebot die wichtigste einzelne Entscheidung.</a:t>
+              <a:t>Vier Zahlen zum Merken. Erstens: Der Tarifsatz, mit dem der Kreis kalkuliert, liegt rund 40 Prozent über dem Mindestlohn — wer heute Mindestlohn zahlt, hat im Pool zunächst Luft, aber weniger als man denkt. Zweitens die Nachfrage: In Schleswig-Holstein von 2.700 auf rund 7.000 begleitete Kinder, in Hamburg von 1.574 auf 4.011 — die Hamburger Zahl ist aus Juni 2026 und damit die aktuellste, die öffentlich vorliegt. Bundesweit erhielten 2024 rund 324.570 Kinder unter 18 Eingliederungshilfe, die Ausgaben stiegen um 12,9 Prozent. Drittens: Das Budget hängt an Klassen, nicht an Fällen — die Menge ist damit planbar. Viertens, und das ist der Haken: Der Preis steht bis zu neun Jahre fest, Tarifsteigerungen trägt der Träger allein. Deshalb ist die Kalkulation beim Angebot die wichtigste einzelne Entscheidung.</a:t>
             </a:r>
           </a:p>
         </p:txBody>
@@ -50088,7 +50158,7 @@
         <p:spPr>
           <a:xfrm>
             <a:off x="9802368" y="1993392"/>
-            <a:ext cx="1709928" cy="640080"/>
+            <a:ext cx="1709928" cy="786384"/>
           </a:xfrm>
           <a:prstGeom prst="rect">
             <a:avLst/>
@@ -50113,13 +50183,13 @@
               </a:spcAft>
             </a:pPr>
             <a:r>
-              <a:rPr sz="760" b="0" i="0">
+              <a:rPr sz="740" b="0" i="0">
                 <a:solidFill>
                   <a:srgbClr val="888888"/>
                 </a:solidFill>
                 <a:latin typeface="Open Sans"/>
               </a:rPr>
-              <a:t>Öffentlich belegt nur Kreis Pinneberg. Blass: Angabe des Unternehmens.</a:t>
+              <a:t>Nur Kreis Pinneberg belegt — s-k-p.net nennt kein weiteres Gebiet. Blass = Angabe des Unternehmens.</a:t>
             </a:r>
           </a:p>
         </p:txBody>
@@ -50199,7 +50269,7 @@
         <p:spPr>
           <a:xfrm>
             <a:off x="9802368" y="3273551"/>
-            <a:ext cx="1709928" cy="640080"/>
+            <a:ext cx="1709928" cy="786384"/>
           </a:xfrm>
           <a:prstGeom prst="rect">
             <a:avLst/>
@@ -50224,13 +50294,13 @@
               </a:spcAft>
             </a:pPr>
             <a:r>
-              <a:rPr sz="760" b="0" i="0">
+              <a:rPr sz="740" b="0" i="0">
                 <a:solidFill>
                   <a:srgbClr val="888888"/>
                 </a:solidFill>
                 <a:latin typeface="Open Sans"/>
               </a:rPr>
-              <a:t>Neun Kreise und kreisfreie Städte, eigene Bereichsleitungen je Region.</a:t>
+              <a:t>Neun Kreise und kreisfreie Städte — awo-sh.de, Standortliste mit Bereichs- und Teamleitungen.</a:t>
             </a:r>
           </a:p>
         </p:txBody>
@@ -50310,7 +50380,7 @@
         <p:spPr>
           <a:xfrm>
             <a:off x="9802368" y="4553712"/>
-            <a:ext cx="1709928" cy="640080"/>
+            <a:ext cx="1709928" cy="786384"/>
           </a:xfrm>
           <a:prstGeom prst="rect">
             <a:avLst/>
@@ -50335,13 +50405,13 @@
               </a:spcAft>
             </a:pPr>
             <a:r>
-              <a:rPr sz="760" b="0" i="0">
+              <a:rPr sz="740" b="0" i="0">
                 <a:solidFill>
                   <a:srgbClr val="888888"/>
                 </a:solidFill>
                 <a:latin typeface="Open Sans"/>
               </a:rPr>
-              <a:t>Vier Kreise mit belegter Schulbegleitung, Mitgliedsverbände fast landesweit.</a:t>
+              <a:t>Vier Kreise mit belegter Schulbegleitung — lebenshilfe-sh.de und die Angebotsseiten der Kreisverbände.</a:t>
             </a:r>
           </a:p>
         </p:txBody>
@@ -50771,7 +50841,7 @@
         <p:spPr>
           <a:xfrm>
             <a:off x="1426464" y="3346704"/>
-            <a:ext cx="3246120" cy="2212848"/>
+            <a:ext cx="3246120" cy="2743200"/>
           </a:xfrm>
           <a:prstGeom prst="roundRect">
             <a:avLst>
@@ -50815,7 +50885,7 @@
         <p:spPr>
           <a:xfrm>
             <a:off x="1572768" y="3456432"/>
-            <a:ext cx="2953512" cy="1993391"/>
+            <a:ext cx="2953512" cy="2523744"/>
           </a:xfrm>
           <a:prstGeom prst="rect">
             <a:avLst/>
@@ -51233,7 +51303,7 @@
         <p:spPr>
           <a:xfrm>
             <a:off x="4846320" y="3346704"/>
-            <a:ext cx="3246120" cy="2212848"/>
+            <a:ext cx="3246120" cy="2743200"/>
           </a:xfrm>
           <a:prstGeom prst="roundRect">
             <a:avLst>
@@ -51277,7 +51347,7 @@
         <p:spPr>
           <a:xfrm>
             <a:off x="4992624" y="3456432"/>
-            <a:ext cx="2953512" cy="1993391"/>
+            <a:ext cx="2953512" cy="2523744"/>
           </a:xfrm>
           <a:prstGeom prst="rect">
             <a:avLst/>
@@ -51485,7 +51555,7 @@
         <p:spPr>
           <a:xfrm>
             <a:off x="8266175" y="1755648"/>
-            <a:ext cx="3246120" cy="1481328"/>
+            <a:ext cx="3246120" cy="1298448"/>
           </a:xfrm>
           <a:prstGeom prst="roundRect">
             <a:avLst>
@@ -51529,7 +51599,7 @@
         <p:spPr>
           <a:xfrm>
             <a:off x="8412480" y="1865376"/>
-            <a:ext cx="2953512" cy="1261872"/>
+            <a:ext cx="2953512" cy="1078992"/>
           </a:xfrm>
           <a:prstGeom prst="rect">
             <a:avLst/>
@@ -51573,7 +51643,7 @@
               </a:spcAft>
             </a:pPr>
             <a:r>
-              <a:rPr sz="840" b="0" i="0">
+              <a:rPr sz="800" b="0" i="0">
                 <a:solidFill>
                   <a:srgbClr val="6E7D00"/>
                 </a:solidFill>
@@ -51582,13 +51652,13 @@
               <a:t>▪ </a:t>
             </a:r>
             <a:r>
-              <a:rPr sz="840" b="0" i="0">
+              <a:rPr sz="800" b="0" i="0">
                 <a:solidFill>
                   <a:srgbClr val="3D3D3D"/>
                 </a:solidFill>
                 <a:latin typeface="Open Sans"/>
               </a:rPr>
-              <a:t>Landesregierung SH · Grüne: „Wir sind klar für jede Poollösung!“ · CDU-Antrag zur systemischen Weiterentwicklung</a:t>
+              <a:t>Landesregierung SH · Grüne: „Wir sind klar für jede Poollösung!“ · CDU-Antrag</a:t>
             </a:r>
           </a:p>
           <a:p>
@@ -51604,7 +51674,7 @@
               </a:spcAft>
             </a:pPr>
             <a:r>
-              <a:rPr sz="840" b="0" i="0">
+              <a:rPr sz="800" b="0" i="0">
                 <a:solidFill>
                   <a:srgbClr val="6E7D00"/>
                 </a:solidFill>
@@ -51613,13 +51683,13 @@
               <a:t>▪ </a:t>
             </a:r>
             <a:r>
-              <a:rPr sz="840" b="0" i="0">
+              <a:rPr sz="800" b="0" i="0">
                 <a:solidFill>
                   <a:srgbClr val="3D3D3D"/>
                 </a:solidFill>
                 <a:latin typeface="Open Sans"/>
               </a:rPr>
-              <a:t>Bund: Referentenentwurf 1. KJHSRG vom 23.03.2026</a:t>
+              <a:t>SPD in SH drängt auf Tempo, nicht auf Rücknahme</a:t>
             </a:r>
           </a:p>
           <a:p>
@@ -51635,7 +51705,7 @@
               </a:spcAft>
             </a:pPr>
             <a:r>
-              <a:rPr sz="840" b="0" i="0">
+              <a:rPr sz="800" b="0" i="0">
                 <a:solidFill>
                   <a:srgbClr val="6E7D00"/>
                 </a:solidFill>
@@ -51644,13 +51714,44 @@
               <a:t>▪ </a:t>
             </a:r>
             <a:r>
-              <a:rPr sz="840" b="0" i="0">
+              <a:rPr sz="800" b="0" i="0">
                 <a:solidFill>
                   <a:srgbClr val="3D3D3D"/>
                 </a:solidFill>
                 <a:latin typeface="Open Sans"/>
               </a:rPr>
-              <a:t>Kommunale Kostenträger · Robert Bosch und Telekom Stiftung · DISW-Evaluation</a:t>
+              <a:t>Bund: Referentenentwurf 1. KJHSRG vom 23.03.2026</a:t>
+            </a:r>
+          </a:p>
+          <a:p>
+            <a:pPr>
+              <a:lnSpc>
+                <a:spcPct val="110000"/>
+              </a:lnSpc>
+              <a:spcBef>
+                <a:spcPts val="200"/>
+              </a:spcBef>
+              <a:spcAft>
+                <a:spcPts val="200"/>
+              </a:spcAft>
+            </a:pPr>
+            <a:r>
+              <a:rPr sz="800" b="0" i="0">
+                <a:solidFill>
+                  <a:srgbClr val="6E7D00"/>
+                </a:solidFill>
+                <a:latin typeface="Open Sans"/>
+              </a:rPr>
+              <a:t>▪ </a:t>
+            </a:r>
+            <a:r>
+              <a:rPr sz="800" b="0" i="0">
+                <a:solidFill>
+                  <a:srgbClr val="3D3D3D"/>
+                </a:solidFill>
+                <a:latin typeface="Open Sans"/>
+              </a:rPr>
+              <a:t>Kommunale Kostenträger · Bosch- und Telekom-Stiftung</a:t>
             </a:r>
           </a:p>
         </p:txBody>
@@ -51663,8 +51764,8 @@
         </p:nvSpPr>
         <p:spPr>
           <a:xfrm>
-            <a:off x="8266175" y="3346704"/>
-            <a:ext cx="3246120" cy="1298448"/>
+            <a:off x="8266175" y="3163824"/>
+            <a:ext cx="3246120" cy="1389888"/>
           </a:xfrm>
           <a:prstGeom prst="roundRect">
             <a:avLst>
@@ -51707,8 +51808,8 @@
         </p:nvSpPr>
         <p:spPr>
           <a:xfrm>
-            <a:off x="8412480" y="3456432"/>
-            <a:ext cx="2953512" cy="1078992"/>
+            <a:off x="8412480" y="3273552"/>
+            <a:ext cx="2953512" cy="1170432"/>
           </a:xfrm>
           <a:prstGeom prst="rect">
             <a:avLst/>
@@ -51752,7 +51853,7 @@
               </a:spcAft>
             </a:pPr>
             <a:r>
-              <a:rPr sz="840" b="0" i="0">
+              <a:rPr sz="800" b="0" i="0">
                 <a:solidFill>
                   <a:srgbClr val="E0861A"/>
                 </a:solidFill>
@@ -51761,7 +51862,7 @@
               <a:t>▪ </a:t>
             </a:r>
             <a:r>
-              <a:rPr sz="840" b="0" i="0">
+              <a:rPr sz="800" b="0" i="0">
                 <a:solidFill>
                   <a:srgbClr val="3D3D3D"/>
                 </a:solidFill>
@@ -51783,7 +51884,7 @@
               </a:spcAft>
             </a:pPr>
             <a:r>
-              <a:rPr sz="840" b="0" i="0">
+              <a:rPr sz="800" b="0" i="0">
                 <a:solidFill>
                   <a:srgbClr val="E0861A"/>
                 </a:solidFill>
@@ -51792,13 +51893,44 @@
               <a:t>▪ </a:t>
             </a:r>
             <a:r>
-              <a:rPr sz="840" b="0" i="0">
+              <a:rPr sz="800" b="0" i="0">
                 <a:solidFill>
                   <a:srgbClr val="3D3D3D"/>
                 </a:solidFill>
                 <a:latin typeface="Open Sans"/>
               </a:rPr>
-              <a:t>Lebenshilfe Bundesverband (27.04.2026) · AGJ · SoVD · Verfassungsblog: nicht verfassungskonform</a:t>
+              <a:t>SPD-Bundestagsabgeordnete: Streichliste „inakzeptabel“ (17.04.2026), über 100.000 Unterschriften dagegen</a:t>
+            </a:r>
+          </a:p>
+          <a:p>
+            <a:pPr>
+              <a:lnSpc>
+                <a:spcPct val="110000"/>
+              </a:lnSpc>
+              <a:spcBef>
+                <a:spcPts val="200"/>
+              </a:spcBef>
+              <a:spcAft>
+                <a:spcPts val="200"/>
+              </a:spcAft>
+            </a:pPr>
+            <a:r>
+              <a:rPr sz="800" b="0" i="0">
+                <a:solidFill>
+                  <a:srgbClr val="E0861A"/>
+                </a:solidFill>
+                <a:latin typeface="Open Sans"/>
+              </a:rPr>
+              <a:t>▪ </a:t>
+            </a:r>
+            <a:r>
+              <a:rPr sz="800" b="0" i="0">
+                <a:solidFill>
+                  <a:srgbClr val="3D3D3D"/>
+                </a:solidFill>
+                <a:latin typeface="Open Sans"/>
+              </a:rPr>
+              <a:t>Lebenshilfe · AGJ · SoVD · Verfassungsblog: nicht verfassungskonform</a:t>
             </a:r>
           </a:p>
         </p:txBody>
@@ -51811,8 +51943,8 @@
         </p:nvSpPr>
         <p:spPr>
           <a:xfrm>
-            <a:off x="8266175" y="4791456"/>
-            <a:ext cx="3246120" cy="768096"/>
+            <a:off x="8266175" y="4626864"/>
+            <a:ext cx="3246120" cy="1463040"/>
           </a:xfrm>
           <a:prstGeom prst="roundRect">
             <a:avLst>
@@ -51855,8 +51987,8 @@
         </p:nvSpPr>
         <p:spPr>
           <a:xfrm>
-            <a:off x="8412480" y="4901184"/>
-            <a:ext cx="2953512" cy="548640"/>
+            <a:off x="8412480" y="4736592"/>
+            <a:ext cx="2953512" cy="1243584"/>
           </a:xfrm>
           <a:prstGeom prst="rect">
             <a:avLst/>
@@ -51870,24 +52002,114 @@
           <a:lstStyle/>
           <a:p>
             <a:pPr>
+              <a:spcBef>
+                <a:spcPts val="0"/>
+              </a:spcBef>
+              <a:spcAft>
+                <a:spcPts val="0"/>
+              </a:spcAft>
+            </a:pPr>
+            <a:r>
+              <a:rPr sz="950" b="1" i="0">
+                <a:solidFill>
+                  <a:srgbClr val="1A70B8"/>
+                </a:solidFill>
+                <a:latin typeface="Quicksand"/>
+              </a:rPr>
+              <a:t>Wer die Mehrheit hat</a:t>
+            </a:r>
+          </a:p>
+          <a:p>
+            <a:pPr>
               <a:lnSpc>
-                <a:spcPct val="112000"/>
+                <a:spcPct val="110000"/>
               </a:lnSpc>
               <a:spcBef>
                 <a:spcPts val="200"/>
               </a:spcBef>
               <a:spcAft>
-                <a:spcPts val="0"/>
+                <a:spcPts val="200"/>
               </a:spcAft>
             </a:pPr>
             <a:r>
-              <a:rPr sz="819" b="1" i="0">
-                <a:solidFill>
-                  <a:srgbClr val="3D3D3D"/>
+              <a:rPr sz="800" b="0" i="0">
+                <a:solidFill>
+                  <a:srgbClr val="1A70B8"/>
                 </a:solidFill>
                 <a:latin typeface="Open Sans"/>
               </a:rPr>
-              <a:t>Entschieden ist es trotzdem: Das OVG Schleswig wies die Klage von vier Trägern am 03.09.2024 unanfechtbar zurück (5 MB 7/24).</a:t>
+              <a:t>▪ </a:t>
+            </a:r>
+            <a:r>
+              <a:rPr sz="800" b="0" i="0">
+                <a:solidFill>
+                  <a:srgbClr val="3D3D3D"/>
+                </a:solidFill>
+                <a:latin typeface="Open Sans"/>
+              </a:rPr>
+              <a:t>Land: CDU und Grüne, 48 von 69 Sitzen. Landtagswahl 2027</a:t>
+            </a:r>
+          </a:p>
+          <a:p>
+            <a:pPr>
+              <a:lnSpc>
+                <a:spcPct val="110000"/>
+              </a:lnSpc>
+              <a:spcBef>
+                <a:spcPts val="200"/>
+              </a:spcBef>
+              <a:spcAft>
+                <a:spcPts val="200"/>
+              </a:spcAft>
+            </a:pPr>
+            <a:r>
+              <a:rPr sz="800" b="0" i="0">
+                <a:solidFill>
+                  <a:srgbClr val="1A70B8"/>
+                </a:solidFill>
+                <a:latin typeface="Open Sans"/>
+              </a:rPr>
+              <a:t>▪ </a:t>
+            </a:r>
+            <a:r>
+              <a:rPr sz="800" b="0" i="0">
+                <a:solidFill>
+                  <a:srgbClr val="3D3D3D"/>
+                </a:solidFill>
+                <a:latin typeface="Open Sans"/>
+              </a:rPr>
+              <a:t>Kreis Pinneberg: CDU stärkste Fraktion, 24 von 67. Landrätin Elfi Heesch (parteilos). Der Kreistag hat verschoben</a:t>
+            </a:r>
+          </a:p>
+          <a:p>
+            <a:pPr>
+              <a:lnSpc>
+                <a:spcPct val="110000"/>
+              </a:lnSpc>
+              <a:spcBef>
+                <a:spcPts val="200"/>
+              </a:spcBef>
+              <a:spcAft>
+                <a:spcPts val="200"/>
+              </a:spcAft>
+            </a:pPr>
+            <a:r>
+              <a:rPr sz="800" b="0" i="0">
+                <a:solidFill>
+                  <a:srgbClr val="1A70B8"/>
+                </a:solidFill>
+                <a:latin typeface="Open Sans"/>
+              </a:rPr>
+              <a:t>▪ </a:t>
+            </a:r>
+            <a:r>
+              <a:rPr sz="800" b="0" i="0">
+                <a:solidFill>
+                  <a:srgbClr val="3D3D3D"/>
+                </a:solidFill>
+                <a:latin typeface="Open Sans"/>
+              </a:rPr>
+              <a:t>Bund: Der Entwurf kommt aus dem Haus von Karin Prien (CDU), bis 2025 Bildungsministerin in SH</a:t>
             </a:r>
           </a:p>
         </p:txBody>
@@ -51932,7 +52154,7 @@
                 </a:solidFill>
                 <a:latin typeface="Open Sans"/>
               </a:rPr>
-              <a:t>Quellen: Kreis Pinneberg, Konzept „Klassenassistenz“, Kap. 4–6 · TED 246925-2024 · Landtag SH, Presseticker 28.02.2025 und Drs. 20/3271 · ver.di, „Exklusion statt Inklusion“, 24.04.2026 · Bundesvereinigung Lebenshilfe, 27.04.2026 · OVG Schleswig 5 MB 7/24 · Dworschak u. a. zur Qualifikationsstruktur.</a:t>
+              <a:t>Quellen: Kreis Pinneberg, Konzept „Klassenassistenz“, Kap. 4–6 · TED 246925-2024 · Landtag SH, Presseticker 28.02.2025 und Drs. 20/3271 (Frage 3 der SPD) · ver.di, 24.04.2026 · SPD-Bundestagsabgeordnete Hostert, Klose, Heubach zur Streichliste, 17.04.2026 · Sitzverteilung Landtag SH · Kreistag Pinneberg seit 14.05.2023.</a:t>
             </a:r>
           </a:p>
         </p:txBody>
@@ -52275,7 +52497,7 @@
                 </a:solidFill>
                 <a:latin typeface="Open Sans"/>
               </a:rPr>
-              <a:t>Messlatte: Pinneberg kalkuliert mit TVöD SuE S2 Stufe 5 — rund 70 % über dem Mindestlohn. § 124 SGB IX schützt nur tarifgebundene Träger.</a:t>
+              <a:t>Messlatte: Pinneberg kalkuliert mit TVöD SuE S2 Stufe 5 — rund 40 % über dem Mindestlohn. § 124 SGB IX schützt nur tarifgebundene Träger.</a:t>
             </a:r>
           </a:p>
           <a:p>
@@ -53094,7 +53316,7 @@
                 </a:solidFill>
                 <a:latin typeface="Open Sans"/>
               </a:rPr>
-              <a:t>Der Tarifsatz, mit dem Pinneberg kalkuliert, liegt 70 % über dem Mindestlohn. S2 Stufe 5 = 3.997,10 € bei 39 Wochenstunden.</a:t>
+              <a:t>Der Tarifsatz, mit dem Pinneberg kalkuliert, liegt rund 40 % über dem Mindestlohn (S2 Stufe 5 = 3.330,92 €, 39 Wochenstunden).</a:t>
             </a:r>
           </a:p>
         </p:txBody>
@@ -53136,7 +53358,7 @@
                 </a:solidFill>
                 <a:latin typeface="Quicksand"/>
               </a:rPr>
-              <a:t>Nachfrage — Schulbegleitungen in SH</a:t>
+              <a:t>Nachfrage — begleitete Kinder</a:t>
             </a:r>
           </a:p>
         </p:txBody>
@@ -53199,7 +53421,7 @@
                 </a:solidFill>
                 <a:latin typeface="Open Sans"/>
               </a:rPr>
-              <a:t>+159 % in acht Jahren — und das, obwohl die Schulische Assistenz 2015 gerade eingeführt wurde, um die Zahl zu senken.</a:t>
+              <a:t>SH 2014 → 2022 (126 Mio. € Kreisausgaben). Hamburg 2014/15 → 2025/26 (42,15 Mio. €), Budget 2027 nur +4,4 %.</a:t>
             </a:r>
           </a:p>
         </p:txBody>
@@ -53255,7 +53477,7 @@
         <p:spPr>
           <a:xfrm>
             <a:off x="8266175" y="1737360"/>
-            <a:ext cx="3246120" cy="1143000"/>
+            <a:ext cx="3246120" cy="1572768"/>
           </a:xfrm>
           <a:prstGeom prst="roundRect">
             <a:avLst>
@@ -53299,7 +53521,7 @@
         <p:spPr>
           <a:xfrm>
             <a:off x="8412480" y="1847088"/>
-            <a:ext cx="2953512" cy="923544"/>
+            <a:ext cx="2953512" cy="1353312"/>
           </a:xfrm>
           <a:prstGeom prst="rect">
             <a:avLst/>
@@ -53343,7 +53565,7 @@
               </a:spcAft>
             </a:pPr>
             <a:r>
-              <a:rPr sz="840" b="0" i="0">
+              <a:rPr sz="819" b="0" i="0">
                 <a:solidFill>
                   <a:srgbClr val="3D3D3D"/>
                 </a:solidFill>
@@ -53352,6 +53574,28 @@
               <a:t>Festbetrag aus TVöD SuE S2 Stufe 5, plus 10 % Sachkosten, plus 5 % Verwaltungskostenzuschlag auf die Personalkosten.</a:t>
             </a:r>
           </a:p>
+          <a:p>
+            <a:pPr>
+              <a:lnSpc>
+                <a:spcPct val="112000"/>
+              </a:lnSpc>
+              <a:spcBef>
+                <a:spcPts val="200"/>
+              </a:spcBef>
+              <a:spcAft>
+                <a:spcPts val="0"/>
+              </a:spcAft>
+            </a:pPr>
+            <a:r>
+              <a:rPr sz="780" b="0" i="0">
+                <a:solidFill>
+                  <a:srgbClr val="888888"/>
+                </a:solidFill>
+                <a:latin typeface="Open Sans"/>
+              </a:rPr>
+              <a:t>TVöD SuE = Tarifvertrag für den öffentlichen Dienst, Sozial- und Erziehungsdienst. S2 ist die unterste Entgeltgruppe für Helfertätigkeiten, die Stufe steht für Berufserfahrung.</a:t>
+            </a:r>
+          </a:p>
         </p:txBody>
       </p:sp>
       <p:sp>
@@ -53362,8 +53606,8 @@
         </p:nvSpPr>
         <p:spPr>
           <a:xfrm>
-            <a:off x="8266175" y="2999232"/>
-            <a:ext cx="3246120" cy="978408"/>
+            <a:off x="8266175" y="3419856"/>
+            <a:ext cx="3246120" cy="960120"/>
           </a:xfrm>
           <a:prstGeom prst="roundRect">
             <a:avLst>
@@ -53406,8 +53650,8 @@
         </p:nvSpPr>
         <p:spPr>
           <a:xfrm>
-            <a:off x="8412480" y="3108960"/>
-            <a:ext cx="2953512" cy="758952"/>
+            <a:off x="8412480" y="3529584"/>
+            <a:ext cx="2953512" cy="740664"/>
           </a:xfrm>
           <a:prstGeom prst="rect">
             <a:avLst/>
@@ -53451,7 +53695,7 @@
               </a:spcAft>
             </a:pPr>
             <a:r>
-              <a:rPr sz="840" b="0" i="0">
+              <a:rPr sz="819" b="0" i="0">
                 <a:solidFill>
                   <a:srgbClr val="3D3D3D"/>
                 </a:solidFill>
@@ -53826,7 +54070,7 @@
                 </a:solidFill>
                 <a:latin typeface="Open Sans"/>
               </a:rPr>
-              <a:t>Quellen: Mindestlohnkommission/BMAS · TVöD SuE, Tabelle gültig 01.05.2026–31.03.2027 (VKA, 39 Wochenstunden) · Kreis Pinneberg, Konzept „Klassenassistenz“, Kap. 5–6 · Landtag SH, Rede der Ministerin 28.02.2025 (2.700 → rund 7.000 Schulbegleitungen) · TED 246925-2024 · OVG Schleswig 5 MB 7/24. Stundensätze eigene Umrechnung.</a:t>
+              <a:t>Quellen: Mindestlohnkommission/BMAS · TVöD SuE, Tabelle 01.05.2026–31.03.2027 (VKA, 39 Wochenstunden), Stundensätze eigene Umrechnung · Kreis Pinneberg, Konzept „Klassenassistenz“, Kap. 5–6 · Landtag SH, Rede der Ministerin 28.02.2025 · BSFB Hamburg, PM 26.06.2026 · TED 246925-2024 · OVG Schleswig 5 MB 7/24.</a:t>
             </a:r>
           </a:p>
         </p:txBody>

--- a/praesentation2/SKP-Poolreform-Modelle-und-Financial-Model.pptx
+++ b/praesentation2/SKP-Poolreform-Modelle-und-Financial-Model.pptx
@@ -49504,7 +49504,7 @@
                 </a:solidFill>
                 <a:latin typeface="Open Sans"/>
               </a:rPr>
-              <a:t>Ostholstein: 7 Modellschulen in 4 Regionen, wissenschaftlich begleitet vom DISW</a:t>
+              <a:t>Ostholstein: 7 Modellschulen, u. a. Inselschule Fehmarn und Neustädter Bucht. Je Schule ein eigener Pool</a:t>
             </a:r>
           </a:p>
         </p:txBody>
@@ -50545,7 +50545,7 @@
                 </a:solidFill>
                 <a:latin typeface="Open Sans"/>
               </a:rPr>
-              <a:t>Quellen: Landtag SH Drs. 20/3271 (11.06.2025) und Drs. 20/2643(neu) · Kreis Pinneberg, Konzept „Klassenassistenz“ und PM zum Vertrag mit Familienräume · DISW-Gesamtevaluation Ostholstein 20.11.2023 · TED 246925-2024 · awo-sh.de · lebenshilfe-sh.de · Kartengrundlage GADM/deutschlandGeoJSON.</a:t>
+              <a:t>Quellen: Landtag SH Drs. 20/3271 (11.06.2025) und Drs. 20/2643(neu) · Kreis Pinneberg, Konzept „Klassenassistenz“ und PM zum Vertrag mit Familienräume · DISW-Gesamtevaluation Ostholstein 20.11.2023, S. 5 und 21 f. · TED 246925-2024 · awo-sh.de · lebenshilfe-sh.de · Kartengrundlage GADM/deutschlandGeoJSON.</a:t>
             </a:r>
           </a:p>
         </p:txBody>

--- a/praesentation2/SKP-Poolreform-Modelle-und-Financial-Model.pptx
+++ b/praesentation2/SKP-Poolreform-Modelle-und-Financial-Model.pptx
@@ -5004,7 +5004,7 @@
           <a:lstStyle/>
           <a:p>
             <a:r>
-              <a:t>Kernaussage: Es läuft nicht auf „Pool oder nicht“ hinaus, sondern auf Pool plus multiprofessionelles Team — das sagt die Landesregierung selbst, und einen Endtermin nennt sie nicht. Erprobt wird seit 2013; der Testträger direkt vor der Haustür heißt Familienräume. Wichtig in der Mitte: Die Pinneberger Ausschreibung ist seit über zwei Jahren offen, es gibt keinen Zuschlag — das Zeitfenster steht also noch offen. Rechts die eigentliche Wettbewerbslage: AWO und Lebenshilfe sind landesweit aufgestellt, SKP ist öffentlich nur in einem Kreis nachweisbar.</a:t>
+              <a:t>Kernaussage: Es läuft nicht auf „Pool oder nicht“ hinaus, sondern auf Pool plus multiprofessionelles Team — das sagt die Landesregierung selbst, und einen Endtermin nennt sie nicht. Erprobt wird seit 2013; der Testträger direkt vor der Haustür heißt Familienräume. Wichtig in der Mitte: Die Pinneberger Ausschreibung ist seit über zwei Jahren offen, es gibt keinen Zuschlag — das Zeitfenster steht also noch offen. Rechts die eigentliche Wettbewerbslage: AWO und Lebenshilfe sind landesweit aufgestellt. Und die drei kleinen Anbieter — SKP, FiB und Familienräume — sitzen alle im selben Kreis Pinneberg, also genau dort, wo die schärfste Reform läuft. FiB ist zusätzlich in Hamburg unterwegs. Wer hier einen Standortvertrag verliert, verliert ihn an einen Nachbarn von nebenan.</a:t>
             </a:r>
           </a:p>
         </p:txBody>
@@ -48626,7 +48626,7 @@
         <p:spPr>
           <a:xfrm>
             <a:off x="1426464" y="1719072"/>
-            <a:ext cx="3246120" cy="1627632"/>
+            <a:ext cx="3246120" cy="1737360"/>
           </a:xfrm>
           <a:prstGeom prst="roundRect">
             <a:avLst>
@@ -48670,7 +48670,7 @@
         <p:spPr>
           <a:xfrm>
             <a:off x="1572768" y="1828800"/>
-            <a:ext cx="2953512" cy="1408176"/>
+            <a:ext cx="2953512" cy="1517904"/>
           </a:xfrm>
           <a:prstGeom prst="rect">
             <a:avLst/>
@@ -48795,7 +48795,7 @@
         </p:nvSpPr>
         <p:spPr>
           <a:xfrm>
-            <a:off x="1426464" y="3493008"/>
+            <a:off x="1426464" y="3602736"/>
             <a:ext cx="3246120" cy="749808"/>
           </a:xfrm>
           <a:prstGeom prst="roundRect">
@@ -48839,7 +48839,7 @@
         </p:nvSpPr>
         <p:spPr>
           <a:xfrm>
-            <a:off x="1572768" y="3602736"/>
+            <a:off x="1572768" y="3712463"/>
             <a:ext cx="2953512" cy="530352"/>
           </a:xfrm>
           <a:prstGeom prst="rect">
@@ -48884,8 +48884,8 @@
         </p:nvSpPr>
         <p:spPr>
           <a:xfrm>
-            <a:off x="1426464" y="4370832"/>
-            <a:ext cx="3246120" cy="1225296"/>
+            <a:off x="1426464" y="4480560"/>
+            <a:ext cx="3246120" cy="1298448"/>
           </a:xfrm>
           <a:prstGeom prst="roundRect">
             <a:avLst>
@@ -48928,8 +48928,8 @@
         </p:nvSpPr>
         <p:spPr>
           <a:xfrm>
-            <a:off x="1572768" y="4480560"/>
-            <a:ext cx="2953512" cy="1005840"/>
+            <a:off x="1572768" y="4590288"/>
+            <a:ext cx="2953512" cy="1078992"/>
           </a:xfrm>
           <a:prstGeom prst="rect">
             <a:avLst/>
@@ -50083,9 +50083,54 @@
           </a:p>
         </p:txBody>
       </p:sp>
+      <p:sp>
+        <p:nvSpPr>
+          <p:cNvPr id="35" name="TextBox 34"/>
+          <p:cNvSpPr txBox="1"/>
+          <p:nvPr/>
+        </p:nvSpPr>
+        <p:spPr>
+          <a:xfrm>
+            <a:off x="8266175" y="1700784"/>
+            <a:ext cx="3246120" cy="219456"/>
+          </a:xfrm>
+          <a:prstGeom prst="rect">
+            <a:avLst/>
+          </a:prstGeom>
+          <a:noFill/>
+        </p:spPr>
+        <p:txBody>
+          <a:bodyPr wrap="square" lIns="0" rIns="0" tIns="0" bIns="0" anchor="t">
+            <a:spAutoFit/>
+          </a:bodyPr>
+          <a:lstStyle/>
+          <a:p>
+            <a:pPr>
+              <a:lnSpc>
+                <a:spcPct val="115000"/>
+              </a:lnSpc>
+              <a:spcBef>
+                <a:spcPts val="0"/>
+              </a:spcBef>
+              <a:spcAft>
+                <a:spcPts val="0"/>
+              </a:spcAft>
+            </a:pPr>
+            <a:r>
+              <a:rPr sz="740" b="0" i="0">
+                <a:solidFill>
+                  <a:srgbClr val="888888"/>
+                </a:solidFill>
+                <a:latin typeface="Open Sans"/>
+              </a:rPr>
+              <a:t>Kräftig = öffentlich belegt, blass = Angabe. Drei Anbieter teilen sich einen Kreis, zwei Verbände decken das Land ab.</a:t>
+            </a:r>
+          </a:p>
+        </p:txBody>
+      </p:sp>
       <p:pic>
         <p:nvPicPr>
-          <p:cNvPr id="35" name="Picture 34" descr="karte_skp.png"/>
+          <p:cNvPr id="36" name="Picture 35" descr="karte_skp.png"/>
           <p:cNvPicPr>
             <a:picLocks noChangeAspect="1"/>
           </p:cNvPicPr>
@@ -50099,8 +50144,8 @@
         </p:blipFill>
         <p:spPr>
           <a:xfrm>
-            <a:off x="8266175" y="1700784"/>
-            <a:ext cx="1405757" cy="1170432"/>
+            <a:off x="8266175" y="1938528"/>
+            <a:ext cx="920996" cy="768096"/>
           </a:xfrm>
           <a:prstGeom prst="rect">
             <a:avLst/>
@@ -50109,14 +50154,14 @@
       </p:pic>
       <p:sp>
         <p:nvSpPr>
-          <p:cNvPr id="36" name="TextBox 35"/>
+          <p:cNvPr id="37" name="TextBox 36"/>
           <p:cNvSpPr txBox="1"/>
           <p:nvPr/>
         </p:nvSpPr>
         <p:spPr>
           <a:xfrm>
-            <a:off x="9802368" y="1755648"/>
-            <a:ext cx="1709928" cy="201168"/>
+            <a:off x="9326880" y="1993392"/>
+            <a:ext cx="2185416" cy="182880"/>
           </a:xfrm>
           <a:prstGeom prst="rect">
             <a:avLst/>
@@ -50138,7 +50183,7 @@
               </a:spcAft>
             </a:pPr>
             <a:r>
-              <a:rPr sz="860" b="1" i="0">
+              <a:rPr sz="819" b="1" i="0">
                 <a:solidFill>
                   <a:srgbClr val="1A70B8"/>
                 </a:solidFill>
@@ -50151,14 +50196,14 @@
       </p:sp>
       <p:sp>
         <p:nvSpPr>
-          <p:cNvPr id="37" name="TextBox 36"/>
+          <p:cNvPr id="38" name="TextBox 37"/>
           <p:cNvSpPr txBox="1"/>
           <p:nvPr/>
         </p:nvSpPr>
         <p:spPr>
           <a:xfrm>
-            <a:off x="9802368" y="1993392"/>
-            <a:ext cx="1709928" cy="786384"/>
+            <a:off x="9326880" y="2176272"/>
+            <a:ext cx="2185416" cy="420624"/>
           </a:xfrm>
           <a:prstGeom prst="rect">
             <a:avLst/>
@@ -50183,20 +50228,20 @@
               </a:spcAft>
             </a:pPr>
             <a:r>
-              <a:rPr sz="740" b="0" i="0">
+              <a:rPr sz="700" b="0" i="0">
                 <a:solidFill>
                   <a:srgbClr val="888888"/>
                 </a:solidFill>
                 <a:latin typeface="Open Sans"/>
               </a:rPr>
-              <a:t>Nur Kreis Pinneberg belegt — s-k-p.net nennt kein weiteres Gebiet. Blass = Angabe des Unternehmens.</a:t>
+              <a:t>Nur Kreis Pinneberg belegt (s-k-p.net). Blass = Angabe des Unternehmens.</a:t>
             </a:r>
           </a:p>
         </p:txBody>
       </p:sp>
       <p:pic>
         <p:nvPicPr>
-          <p:cNvPr id="38" name="Picture 37" descr="karte_awo.png"/>
+          <p:cNvPr id="39" name="Picture 38" descr="karte_fib.png"/>
           <p:cNvPicPr>
             <a:picLocks noChangeAspect="1"/>
           </p:cNvPicPr>
@@ -50210,8 +50255,8 @@
         </p:blipFill>
         <p:spPr>
           <a:xfrm>
-            <a:off x="8266175" y="2980944"/>
-            <a:ext cx="1405757" cy="1170432"/>
+            <a:off x="8266175" y="2798064"/>
+            <a:ext cx="920996" cy="768096"/>
           </a:xfrm>
           <a:prstGeom prst="rect">
             <a:avLst/>
@@ -50220,14 +50265,14 @@
       </p:pic>
       <p:sp>
         <p:nvSpPr>
-          <p:cNvPr id="39" name="TextBox 38"/>
+          <p:cNvPr id="40" name="TextBox 39"/>
           <p:cNvSpPr txBox="1"/>
           <p:nvPr/>
         </p:nvSpPr>
         <p:spPr>
           <a:xfrm>
-            <a:off x="9802368" y="3035808"/>
-            <a:ext cx="1709928" cy="201168"/>
+            <a:off x="9326880" y="2852928"/>
+            <a:ext cx="2185416" cy="182880"/>
           </a:xfrm>
           <a:prstGeom prst="rect">
             <a:avLst/>
@@ -50249,27 +50294,27 @@
               </a:spcAft>
             </a:pPr>
             <a:r>
-              <a:rPr sz="860" b="1" i="0">
-                <a:solidFill>
-                  <a:srgbClr val="E0861A"/>
+              <a:rPr sz="819" b="1" i="0">
+                <a:solidFill>
+                  <a:srgbClr val="963A96"/>
                 </a:solidFill>
                 <a:latin typeface="Quicksand"/>
               </a:rPr>
-              <a:t>AWO Schleswig-Holstein</a:t>
-            </a:r>
-          </a:p>
-        </p:txBody>
-      </p:sp>
-      <p:sp>
-        <p:nvSpPr>
-          <p:cNvPr id="40" name="TextBox 39"/>
+              <a:t>FiB — Familien im Blick</a:t>
+            </a:r>
+          </a:p>
+        </p:txBody>
+      </p:sp>
+      <p:sp>
+        <p:nvSpPr>
+          <p:cNvPr id="41" name="TextBox 40"/>
           <p:cNvSpPr txBox="1"/>
           <p:nvPr/>
         </p:nvSpPr>
         <p:spPr>
           <a:xfrm>
-            <a:off x="9802368" y="3273551"/>
-            <a:ext cx="1709928" cy="786384"/>
+            <a:off x="9326880" y="3035808"/>
+            <a:ext cx="2185416" cy="420624"/>
           </a:xfrm>
           <a:prstGeom prst="rect">
             <a:avLst/>
@@ -50294,20 +50339,20 @@
               </a:spcAft>
             </a:pPr>
             <a:r>
-              <a:rPr sz="740" b="0" i="0">
+              <a:rPr sz="700" b="0" i="0">
                 <a:solidFill>
                   <a:srgbClr val="888888"/>
                 </a:solidFill>
                 <a:latin typeface="Open Sans"/>
               </a:rPr>
-              <a:t>Neun Kreise und kreisfreie Städte — awo-sh.de, Standortliste mit Bereichs- und Teamleitungen.</a:t>
+              <a:t>Kreis Pinneberg und Hamburg, Sitz Pinneberg (fib-pinneberg.de).</a:t>
             </a:r>
           </a:p>
         </p:txBody>
       </p:sp>
       <p:pic>
         <p:nvPicPr>
-          <p:cNvPr id="41" name="Picture 40" descr="karte_lebenshilfe.png"/>
+          <p:cNvPr id="42" name="Picture 41" descr="karte_familienraeume.png"/>
           <p:cNvPicPr>
             <a:picLocks noChangeAspect="1"/>
           </p:cNvPicPr>
@@ -50321,8 +50366,8 @@
         </p:blipFill>
         <p:spPr>
           <a:xfrm>
-            <a:off x="8266175" y="4261104"/>
-            <a:ext cx="1405757" cy="1170432"/>
+            <a:off x="8266175" y="3657600"/>
+            <a:ext cx="920996" cy="768096"/>
           </a:xfrm>
           <a:prstGeom prst="rect">
             <a:avLst/>
@@ -50331,14 +50376,14 @@
       </p:pic>
       <p:sp>
         <p:nvSpPr>
-          <p:cNvPr id="42" name="TextBox 41"/>
+          <p:cNvPr id="43" name="TextBox 42"/>
           <p:cNvSpPr txBox="1"/>
           <p:nvPr/>
         </p:nvSpPr>
         <p:spPr>
           <a:xfrm>
-            <a:off x="9802368" y="4315968"/>
-            <a:ext cx="1709928" cy="201168"/>
+            <a:off x="9326880" y="3712463"/>
+            <a:ext cx="2185416" cy="182880"/>
           </a:xfrm>
           <a:prstGeom prst="rect">
             <a:avLst/>
@@ -50360,27 +50405,27 @@
               </a:spcAft>
             </a:pPr>
             <a:r>
-              <a:rPr sz="860" b="1" i="0">
-                <a:solidFill>
-                  <a:srgbClr val="6E7D00"/>
+              <a:rPr sz="819" b="1" i="0">
+                <a:solidFill>
+                  <a:srgbClr val="C0392B"/>
                 </a:solidFill>
                 <a:latin typeface="Quicksand"/>
               </a:rPr>
-              <a:t>Lebenshilfe</a:t>
-            </a:r>
-          </a:p>
-        </p:txBody>
-      </p:sp>
-      <p:sp>
-        <p:nvSpPr>
-          <p:cNvPr id="43" name="TextBox 42"/>
+              <a:t>Familienräume</a:t>
+            </a:r>
+          </a:p>
+        </p:txBody>
+      </p:sp>
+      <p:sp>
+        <p:nvSpPr>
+          <p:cNvPr id="44" name="TextBox 43"/>
           <p:cNvSpPr txBox="1"/>
           <p:nvPr/>
         </p:nvSpPr>
         <p:spPr>
           <a:xfrm>
-            <a:off x="9802368" y="4553712"/>
-            <a:ext cx="1709928" cy="786384"/>
+            <a:off x="9326880" y="3895344"/>
+            <a:ext cx="2185416" cy="420624"/>
           </a:xfrm>
           <a:prstGeom prst="rect">
             <a:avLst/>
@@ -50405,71 +50450,51 @@
               </a:spcAft>
             </a:pPr>
             <a:r>
-              <a:rPr sz="740" b="0" i="0">
+              <a:rPr sz="700" b="0" i="0">
                 <a:solidFill>
                   <a:srgbClr val="888888"/>
                 </a:solidFill>
                 <a:latin typeface="Open Sans"/>
               </a:rPr>
-              <a:t>Vier Kreise mit belegter Schulbegleitung — lebenshilfe-sh.de und die Angebotsseiten der Kreisverbände.</a:t>
-            </a:r>
-          </a:p>
-        </p:txBody>
-      </p:sp>
-      <p:sp>
-        <p:nvSpPr>
-          <p:cNvPr id="44" name="Rounded Rectangle 43"/>
-          <p:cNvSpPr/>
+              <a:t>Ganzer Kreis Pinneberg, Pilot in Tornesch/Uetersen (familienraeume.de).</a:t>
+            </a:r>
+          </a:p>
+        </p:txBody>
+      </p:sp>
+      <p:pic>
+        <p:nvPicPr>
+          <p:cNvPr id="45" name="Picture 44" descr="karte_awo.png"/>
+          <p:cNvPicPr>
+            <a:picLocks noChangeAspect="1"/>
+          </p:cNvPicPr>
           <p:nvPr/>
-        </p:nvSpPr>
-        <p:spPr>
-          <a:xfrm>
-            <a:off x="8266175" y="5541264"/>
-            <a:ext cx="3246120" cy="804672"/>
-          </a:xfrm>
-          <a:prstGeom prst="roundRect">
-            <a:avLst>
-              <a:gd name="adj" fmla="val 6000"/>
-            </a:avLst>
+        </p:nvPicPr>
+        <p:blipFill>
+          <a:blip r:embed="rId5"/>
+          <a:stretch>
+            <a:fillRect/>
+          </a:stretch>
+        </p:blipFill>
+        <p:spPr>
+          <a:xfrm>
+            <a:off x="8266175" y="4517136"/>
+            <a:ext cx="920996" cy="768096"/>
+          </a:xfrm>
+          <a:prstGeom prst="rect">
+            <a:avLst/>
           </a:prstGeom>
-          <a:solidFill>
-            <a:srgbClr val="F2F2F2"/>
-          </a:solidFill>
-          <a:ln>
-            <a:noFill/>
-          </a:ln>
-          <a:effectLst/>
-        </p:spPr>
-        <p:style>
-          <a:lnRef idx="1">
-            <a:schemeClr val="accent1"/>
-          </a:lnRef>
-          <a:fillRef idx="3">
-            <a:schemeClr val="accent1"/>
-          </a:fillRef>
-          <a:effectRef idx="2">
-            <a:schemeClr val="accent1"/>
-          </a:effectRef>
-          <a:fontRef idx="minor">
-            <a:schemeClr val="lt1"/>
-          </a:fontRef>
-        </p:style>
-        <p:txBody>
-          <a:bodyPr rtlCol="0" anchor="ctr"/>
-          <a:lstStyle/>
-          <a:p/>
-        </p:txBody>
-      </p:sp>
-      <p:sp>
-        <p:nvSpPr>
-          <p:cNvPr id="45" name="TextBox 44"/>
+        </p:spPr>
+      </p:pic>
+      <p:sp>
+        <p:nvSpPr>
+          <p:cNvPr id="46" name="TextBox 45"/>
           <p:cNvSpPr txBox="1"/>
           <p:nvPr/>
         </p:nvSpPr>
         <p:spPr>
           <a:xfrm>
-            <a:off x="8412480" y="5650992"/>
-            <a:ext cx="2953512" cy="585216"/>
+            <a:off x="9326880" y="4571999"/>
+            <a:ext cx="2185416" cy="182880"/>
           </a:xfrm>
           <a:prstGeom prst="rect">
             <a:avLst/>
@@ -50483,31 +50508,184 @@
           <a:lstStyle/>
           <a:p>
             <a:pPr>
-              <a:lnSpc>
-                <a:spcPct val="112000"/>
-              </a:lnSpc>
               <a:spcBef>
-                <a:spcPts val="200"/>
+                <a:spcPts val="0"/>
               </a:spcBef>
               <a:spcAft>
                 <a:spcPts val="0"/>
               </a:spcAft>
             </a:pPr>
             <a:r>
-              <a:rPr sz="800" b="0" i="0">
-                <a:solidFill>
-                  <a:srgbClr val="3D3D3D"/>
+              <a:rPr sz="819" b="1" i="0">
+                <a:solidFill>
+                  <a:srgbClr val="E0861A"/>
+                </a:solidFill>
+                <a:latin typeface="Quicksand"/>
+              </a:rPr>
+              <a:t>AWO Schleswig-Holstein</a:t>
+            </a:r>
+          </a:p>
+        </p:txBody>
+      </p:sp>
+      <p:sp>
+        <p:nvSpPr>
+          <p:cNvPr id="47" name="TextBox 46"/>
+          <p:cNvSpPr txBox="1"/>
+          <p:nvPr/>
+        </p:nvSpPr>
+        <p:spPr>
+          <a:xfrm>
+            <a:off x="9326880" y="4754879"/>
+            <a:ext cx="2185416" cy="420624"/>
+          </a:xfrm>
+          <a:prstGeom prst="rect">
+            <a:avLst/>
+          </a:prstGeom>
+          <a:noFill/>
+        </p:spPr>
+        <p:txBody>
+          <a:bodyPr wrap="square" lIns="0" rIns="0" tIns="0" bIns="0" anchor="t">
+            <a:spAutoFit/>
+          </a:bodyPr>
+          <a:lstStyle/>
+          <a:p>
+            <a:pPr>
+              <a:lnSpc>
+                <a:spcPct val="115000"/>
+              </a:lnSpc>
+              <a:spcBef>
+                <a:spcPts val="0"/>
+              </a:spcBef>
+              <a:spcAft>
+                <a:spcPts val="0"/>
+              </a:spcAft>
+            </a:pPr>
+            <a:r>
+              <a:rPr sz="700" b="0" i="0">
+                <a:solidFill>
+                  <a:srgbClr val="888888"/>
                 </a:solidFill>
                 <a:latin typeface="Open Sans"/>
               </a:rPr>
-              <a:t>AWO und Lebenshilfe sind landesweit aufgestellt. Für SKP ist öffentlich ein einziger Kreis nachweisbar — das ist die Ausgangslage im Wettbewerb um Standortverträge.</a:t>
-            </a:r>
-          </a:p>
-        </p:txBody>
-      </p:sp>
-      <p:sp>
-        <p:nvSpPr>
-          <p:cNvPr id="46" name="TextBox 45"/>
+              <a:t>Neun Kreise und kreisfreie Städte (awo-sh.de, Standortliste).</a:t>
+            </a:r>
+          </a:p>
+        </p:txBody>
+      </p:sp>
+      <p:pic>
+        <p:nvPicPr>
+          <p:cNvPr id="48" name="Picture 47" descr="karte_lebenshilfe.png"/>
+          <p:cNvPicPr>
+            <a:picLocks noChangeAspect="1"/>
+          </p:cNvPicPr>
+          <p:nvPr/>
+        </p:nvPicPr>
+        <p:blipFill>
+          <a:blip r:embed="rId6"/>
+          <a:stretch>
+            <a:fillRect/>
+          </a:stretch>
+        </p:blipFill>
+        <p:spPr>
+          <a:xfrm>
+            <a:off x="8266175" y="5376671"/>
+            <a:ext cx="920996" cy="768096"/>
+          </a:xfrm>
+          <a:prstGeom prst="rect">
+            <a:avLst/>
+          </a:prstGeom>
+        </p:spPr>
+      </p:pic>
+      <p:sp>
+        <p:nvSpPr>
+          <p:cNvPr id="49" name="TextBox 48"/>
+          <p:cNvSpPr txBox="1"/>
+          <p:nvPr/>
+        </p:nvSpPr>
+        <p:spPr>
+          <a:xfrm>
+            <a:off x="9326880" y="5431535"/>
+            <a:ext cx="2185416" cy="182880"/>
+          </a:xfrm>
+          <a:prstGeom prst="rect">
+            <a:avLst/>
+          </a:prstGeom>
+          <a:noFill/>
+        </p:spPr>
+        <p:txBody>
+          <a:bodyPr wrap="square" lIns="0" rIns="0" tIns="0" bIns="0" anchor="t">
+            <a:spAutoFit/>
+          </a:bodyPr>
+          <a:lstStyle/>
+          <a:p>
+            <a:pPr>
+              <a:spcBef>
+                <a:spcPts val="0"/>
+              </a:spcBef>
+              <a:spcAft>
+                <a:spcPts val="0"/>
+              </a:spcAft>
+            </a:pPr>
+            <a:r>
+              <a:rPr sz="819" b="1" i="0">
+                <a:solidFill>
+                  <a:srgbClr val="6E7D00"/>
+                </a:solidFill>
+                <a:latin typeface="Quicksand"/>
+              </a:rPr>
+              <a:t>Lebenshilfe</a:t>
+            </a:r>
+          </a:p>
+        </p:txBody>
+      </p:sp>
+      <p:sp>
+        <p:nvSpPr>
+          <p:cNvPr id="50" name="TextBox 49"/>
+          <p:cNvSpPr txBox="1"/>
+          <p:nvPr/>
+        </p:nvSpPr>
+        <p:spPr>
+          <a:xfrm>
+            <a:off x="9326880" y="5614415"/>
+            <a:ext cx="2185416" cy="420624"/>
+          </a:xfrm>
+          <a:prstGeom prst="rect">
+            <a:avLst/>
+          </a:prstGeom>
+          <a:noFill/>
+        </p:spPr>
+        <p:txBody>
+          <a:bodyPr wrap="square" lIns="0" rIns="0" tIns="0" bIns="0" anchor="t">
+            <a:spAutoFit/>
+          </a:bodyPr>
+          <a:lstStyle/>
+          <a:p>
+            <a:pPr>
+              <a:lnSpc>
+                <a:spcPct val="115000"/>
+              </a:lnSpc>
+              <a:spcBef>
+                <a:spcPts val="0"/>
+              </a:spcBef>
+              <a:spcAft>
+                <a:spcPts val="0"/>
+              </a:spcAft>
+            </a:pPr>
+            <a:r>
+              <a:rPr sz="700" b="0" i="0">
+                <a:solidFill>
+                  <a:srgbClr val="888888"/>
+                </a:solidFill>
+                <a:latin typeface="Open Sans"/>
+              </a:rPr>
+              <a:t>Vier Kreise belegt, Kreisverbände fast landesweit (lebenshilfe-sh.de).</a:t>
+            </a:r>
+          </a:p>
+        </p:txBody>
+      </p:sp>
+      <p:sp>
+        <p:nvSpPr>
+          <p:cNvPr id="51" name="TextBox 50"/>
           <p:cNvSpPr txBox="1"/>
           <p:nvPr/>
         </p:nvSpPr>
@@ -50545,7 +50723,7 @@
                 </a:solidFill>
                 <a:latin typeface="Open Sans"/>
               </a:rPr>
-              <a:t>Quellen: Landtag SH Drs. 20/3271 (11.06.2025) und Drs. 20/2643(neu) · Kreis Pinneberg, Konzept „Klassenassistenz“ und PM zum Vertrag mit Familienräume · DISW-Gesamtevaluation Ostholstein 20.11.2023, S. 5 und 21 f. · TED 246925-2024 · awo-sh.de · lebenshilfe-sh.de · Kartengrundlage GADM/deutschlandGeoJSON.</a:t>
+              <a:t>Quellen: Landtag SH Drs. 20/3271 (11.06.2025) und Drs. 20/2643(neu) · Kreis Pinneberg, Konzept „Klassenassistenz“ und PM zum Vertrag mit Familienräume · DISW-Gesamtevaluation Ostholstein 20.11.2023, S. 5 und 21 f. · TED 246925-2024 · Karten: s-k-p.net · fib-pinneberg.de · familienraeume.de · awo-sh.de · lebenshilfe-sh.de · Kartengrundlage GADM/deutschlandGeoJSON.</a:t>
             </a:r>
           </a:p>
         </p:txBody>
@@ -50841,7 +51019,7 @@
         <p:spPr>
           <a:xfrm>
             <a:off x="1426464" y="3346704"/>
-            <a:ext cx="3246120" cy="2743200"/>
+            <a:ext cx="3246120" cy="2907792"/>
           </a:xfrm>
           <a:prstGeom prst="roundRect">
             <a:avLst>
@@ -50885,7 +51063,7 @@
         <p:spPr>
           <a:xfrm>
             <a:off x="1572768" y="3456432"/>
-            <a:ext cx="2953512" cy="2523744"/>
+            <a:ext cx="2953512" cy="2688336"/>
           </a:xfrm>
           <a:prstGeom prst="rect">
             <a:avLst/>
@@ -51303,7 +51481,7 @@
         <p:spPr>
           <a:xfrm>
             <a:off x="4846320" y="3346704"/>
-            <a:ext cx="3246120" cy="2743200"/>
+            <a:ext cx="3246120" cy="2907792"/>
           </a:xfrm>
           <a:prstGeom prst="roundRect">
             <a:avLst>
@@ -51347,7 +51525,7 @@
         <p:spPr>
           <a:xfrm>
             <a:off x="4992624" y="3456432"/>
-            <a:ext cx="2953512" cy="2523744"/>
+            <a:ext cx="2953512" cy="2688336"/>
           </a:xfrm>
           <a:prstGeom prst="rect">
             <a:avLst/>
@@ -51555,7 +51733,7 @@
         <p:spPr>
           <a:xfrm>
             <a:off x="8266175" y="1755648"/>
-            <a:ext cx="3246120" cy="1298448"/>
+            <a:ext cx="3246120" cy="1371600"/>
           </a:xfrm>
           <a:prstGeom prst="roundRect">
             <a:avLst>
@@ -51599,7 +51777,7 @@
         <p:spPr>
           <a:xfrm>
             <a:off x="8412480" y="1865376"/>
-            <a:ext cx="2953512" cy="1078992"/>
+            <a:ext cx="2953512" cy="1152144"/>
           </a:xfrm>
           <a:prstGeom prst="rect">
             <a:avLst/>
@@ -51764,8 +51942,8 @@
         </p:nvSpPr>
         <p:spPr>
           <a:xfrm>
-            <a:off x="8266175" y="3163824"/>
-            <a:ext cx="3246120" cy="1389888"/>
+            <a:off x="8266175" y="3236976"/>
+            <a:ext cx="3246120" cy="1463040"/>
           </a:xfrm>
           <a:prstGeom prst="roundRect">
             <a:avLst>
@@ -51808,8 +51986,8 @@
         </p:nvSpPr>
         <p:spPr>
           <a:xfrm>
-            <a:off x="8412480" y="3273552"/>
-            <a:ext cx="2953512" cy="1170432"/>
+            <a:off x="8412480" y="3346704"/>
+            <a:ext cx="2953512" cy="1243584"/>
           </a:xfrm>
           <a:prstGeom prst="rect">
             <a:avLst/>
@@ -51943,8 +52121,8 @@
         </p:nvSpPr>
         <p:spPr>
           <a:xfrm>
-            <a:off x="8266175" y="4626864"/>
-            <a:ext cx="3246120" cy="1463040"/>
+            <a:off x="8266175" y="4773168"/>
+            <a:ext cx="3246120" cy="1481328"/>
           </a:xfrm>
           <a:prstGeom prst="roundRect">
             <a:avLst>
@@ -51987,8 +52165,8 @@
         </p:nvSpPr>
         <p:spPr>
           <a:xfrm>
-            <a:off x="8412480" y="4736592"/>
-            <a:ext cx="2953512" cy="1243584"/>
+            <a:off x="8412480" y="4882896"/>
+            <a:ext cx="2953512" cy="1261872"/>
           </a:xfrm>
           <a:prstGeom prst="rect">
             <a:avLst/>

--- a/praesentation2/SKP-Poolreform-Modelle-und-Financial-Model.pptx
+++ b/praesentation2/SKP-Poolreform-Modelle-und-Financial-Model.pptx
@@ -5004,7 +5004,7 @@
           <a:lstStyle/>
           <a:p>
             <a:r>
-              <a:t>Kernaussage: Es läuft nicht auf „Pool oder nicht“ hinaus, sondern auf Pool plus multiprofessionelles Team — das sagt die Landesregierung selbst, und einen Endtermin nennt sie nicht. Erprobt wird seit 2013; der Testträger direkt vor der Haustür heißt Familienräume. Wichtig in der Mitte: Die Pinneberger Ausschreibung ist seit über zwei Jahren offen, es gibt keinen Zuschlag — das Zeitfenster steht also noch offen. Rechts die eigentliche Wettbewerbslage: AWO und Lebenshilfe sind landesweit aufgestellt. Und die drei kleinen Anbieter — SKP, FiB und Familienräume — sitzen alle im selben Kreis Pinneberg, also genau dort, wo die schärfste Reform läuft. FiB ist zusätzlich in Hamburg unterwegs. Wer hier einen Standortvertrag verliert, verliert ihn an einen Nachbarn von nebenan.</a:t>
+              <a:t>Kernaussage: Es läuft nicht auf „Pool oder nicht“ hinaus, sondern auf Pool plus multiprofessionelles Team — das sagt die Landesregierung selbst, und einen Endtermin nennt sie nicht. Erprobt wird seit 2013; der Testträger direkt vor der Haustür heißt Familienräume. Wichtig in der Mitte: Die Pinneberger Ausschreibung ist seit über zwei Jahren offen, es gibt keinen Zuschlag — das Zeitfenster steht also noch offen. Rechts die eigentliche Wettbewerbslage: AWO und Lebenshilfe sind landesweit aufgestellt. Wichtig zur Karte: Bei SKP ist nur der Kreis Pinneberg eingefärbt, weil es für kein weiteres Gebiet eine öffentliche Quelle gibt — das ist eine Frage an das Management, keine Aussage über den tatsächlichen Umfang. Die drei kleinen Anbieter — SKP, FiB und Familienräume — sitzen alle im selben Kreis Pinneberg, also genau dort, wo die schärfste Reform läuft. FiB ist zusätzlich in Hamburg unterwegs. Wer hier einen Standortvertrag verliert, verliert ihn an einen Nachbarn von nebenan.</a:t>
             </a:r>
           </a:p>
         </p:txBody>
@@ -50123,7 +50123,7 @@
                 </a:solidFill>
                 <a:latin typeface="Open Sans"/>
               </a:rPr>
-              <a:t>Kräftig = öffentlich belegt, blass = Angabe. Drei Anbieter teilen sich einen Kreis, zwei Verbände decken das Land ab.</a:t>
+              <a:t>Kräftig = öffentlich belegte Schulbegleitung. Drei Anbieter teilen sich einen Kreis, zwei Verbände decken das Land ab.</a:t>
             </a:r>
           </a:p>
         </p:txBody>
@@ -50234,7 +50234,7 @@
                 </a:solidFill>
                 <a:latin typeface="Open Sans"/>
               </a:rPr>
-              <a:t>Nur Kreis Pinneberg belegt (s-k-p.net). Blass = Angabe des Unternehmens.</a:t>
+              <a:t>Nur Kreis Pinneberg — s-k-p.net nennt kein weiteres Gebiet. Weitere Regionen wären im Datenraum zu belegen.</a:t>
             </a:r>
           </a:p>
         </p:txBody>
@@ -50678,7 +50678,7 @@
                 </a:solidFill>
                 <a:latin typeface="Open Sans"/>
               </a:rPr>
-              <a:t>Vier Kreise belegt, Kreisverbände fast landesweit (lebenshilfe-sh.de).</a:t>
+              <a:t>Vier Kreise belegt. Blass: Kreisverband vor Ort, Schulbegleitung dort nicht einzeln geprüft (lebenshilfe-sh.de).</a:t>
             </a:r>
           </a:p>
         </p:txBody>
@@ -53261,7 +53261,7 @@
                 </a:solidFill>
                 <a:latin typeface="Open Sans"/>
               </a:rPr>
-              <a:t>Kreisscharfe Marktzahlen zur Schulbegleitung sind nicht öffentlich. Auch SKPs eigene Website nennt als Einsatzgebiet nur den Kreis Pinneberg — jede weitere Region ist Angabe des Unternehmens.</a:t>
+              <a:t>Kreisscharfe Marktzahlen zur Schulbegleitung sind nicht öffentlich. SKPs eigene Website nennt als Einsatzgebiet ausschließlich den Kreis Pinneberg — für jede weitere Region fehlt bislang jeder Beleg.</a:t>
             </a:r>
           </a:p>
           <a:p>

--- a/praesentation2/SKP-Poolreform-Modelle-und-Financial-Model.pptx
+++ b/praesentation2/SKP-Poolreform-Modelle-und-Financial-Model.pptx
@@ -49903,7 +49903,7 @@
                 </a:solidFill>
                 <a:latin typeface="Open Sans"/>
               </a:rPr>
-              <a:t>Robert Bosch Stiftung und Deutsche Telekom Stiftung bewerten die Poolmodelle und fördern die Weiterentwicklung</a:t>
+              <a:t>Robert Bosch und Telekom Stiftung begleiten den Landesprozess. Ein Ergebnis ist bislang nicht veröffentlicht</a:t>
             </a:r>
           </a:p>
         </p:txBody>
